--- a/public/fun/pack/pptx/newspro/카드뉴스프리미엄_34_감사·칭찬_포레스트골드.pptx
+++ b/public/fun/pack/pptx/newspro/카드뉴스프리미엄_34_감사·칭찬_포레스트골드.pptx
@@ -113,12 +113,12 @@
   <p:extLst>
     <p:ext uri="{521415D9-36F7-43E2-AB2F-B90AF26B5E84}">
       <p14:sectionLst xmlns:p14="http://schemas.microsoft.com/office/powerpoint/2010/main">
-        <p14:section name="시작" id="{0D78F692-0538-49FB-B4A2-2C1C9B1C864D}">
+        <p14:section name="시작" id="{91BBE29C-7FA7-4A8D-9651-8F1217D1737D}">
           <p14:sldIdLst>
             <p14:sldId id="256"/>
           </p14:sldIdLst>
         </p14:section>
-        <p14:section name="본문" id="{38CE87B5-C216-4258-AE8F-7B15493EE660}">
+        <p14:section name="본문" id="{587808E9-D903-4FF0-9DE6-737612B46AD4}">
           <p14:sldIdLst>
             <p14:sldId id="257"/>
             <p14:sldId id="258"/>
@@ -127,7 +127,7 @@
             <p14:sldId id="261"/>
           </p14:sldIdLst>
         </p14:section>
-        <p14:section name="마무리" id="{39082FEA-3C46-4288-AF19-66685D67DD07}">
+        <p14:section name="마무리" id="{5DC8DA46-277F-4E17-86F4-4EB99A9AA229}">
           <p14:sldIdLst>
             <p14:sldId id="262"/>
           </p14:sldIdLst>
@@ -1528,7 +1528,7 @@
             </a:lvl1pPr>
           </a:lstStyle>
           <a:p>
-            <a:fld id="{4A3E1000-E4A3-4E47-A99E-DC6E5C960B7B}" type="slidenum">
+            <a:fld id="{6845505A-4E3E-4B7F-9003-2CD371D1267B}" type="slidenum">
               <a:rPr lang="en-US"/>
               <a:t>‹#›</a:t>
             </a:fld>
@@ -2524,7 +2524,7 @@
             </a:lvl1pPr>
           </a:lstStyle>
           <a:p>
-            <a:fld id="{C718B876-EC9B-48BD-BBA0-B9F483B9AE7B}" type="slidenum">
+            <a:fld id="{4623F72F-157C-4659-A702-436E278AC73F}" type="slidenum">
               <a:rPr lang="en-US"/>
               <a:t>‹#›</a:t>
             </a:fld>
@@ -3531,7 +3531,7 @@
             </a:lvl1pPr>
           </a:lstStyle>
           <a:p>
-            <a:fld id="{D6983673-D159-479E-B6DE-48FE4D371664}" type="slidenum">
+            <a:fld id="{09333153-B8E6-4377-A54C-B292DE5CD852}" type="slidenum">
               <a:rPr lang="en-US"/>
               <a:t>‹#›</a:t>
             </a:fld>
@@ -4779,7 +4779,7 @@
           <a:bodyPr/>
           <a:lstStyle/>
           <a:p>
-            <a:fld id="{BA566B1B-8D46-4668-B87C-FDB1B196FDFE}" type="slidenum">
+            <a:fld id="{1EB04DD8-D506-4ABA-A194-C08DCD8557F9}" type="slidenum">
               <a:rPr lang="en-US"/>
               <a:t>‹#›</a:t>
             </a:fld>
@@ -4945,7 +4945,7 @@
           <a:bodyPr/>
           <a:lstStyle/>
           <a:p>
-            <a:fld id="{21CB3208-1D6D-4129-8E76-D186B95A8441}" type="slidenum">
+            <a:fld id="{CA867ABF-36D6-4FA0-8391-9790D3055AF0}" type="slidenum">
               <a:rPr lang="en-US"/>
               <a:t>‹#›</a:t>
             </a:fld>
@@ -5111,7 +5111,7 @@
           <a:bodyPr/>
           <a:lstStyle/>
           <a:p>
-            <a:fld id="{3B9CB1F3-F347-4584-819D-621CF4FE40E9}" type="slidenum">
+            <a:fld id="{04849898-D1A8-40F2-A177-E5EA893EDE16}" type="slidenum">
               <a:rPr lang="en-US"/>
               <a:t>‹#›</a:t>
             </a:fld>
@@ -5277,7 +5277,7 @@
           <a:bodyPr/>
           <a:lstStyle/>
           <a:p>
-            <a:fld id="{19C2D6B3-A9C2-4171-8972-3482DD122AA8}" type="slidenum">
+            <a:fld id="{63423A56-A0B5-4583-A91A-97E4082969B8}" type="slidenum">
               <a:rPr lang="en-US"/>
               <a:t>‹#›</a:t>
             </a:fld>
@@ -5443,7 +5443,7 @@
           <a:bodyPr/>
           <a:lstStyle/>
           <a:p>
-            <a:fld id="{FD33316F-B123-4F62-8C42-98256F77F9A0}" type="slidenum">
+            <a:fld id="{44D4EDE5-B122-4904-A2E3-6C83C76D2FEB}" type="slidenum">
               <a:rPr lang="en-US"/>
               <a:t>‹#›</a:t>
             </a:fld>
